--- a/docs/flowgrid-os-partner-deck.pptx
+++ b/docs/flowgrid-os-partner-deck.pptx
@@ -9,7 +9,6 @@
     <p:sldId id="257" r:id="rId8"/>
     <p:sldId id="258" r:id="rId9"/>
     <p:sldId id="259" r:id="rId10"/>
-    <p:sldId id="260" r:id="rId11"/>
     <p:sldId id="261" r:id="rId12"/>
     <p:sldId id="262" r:id="rId13"/>
   </p:sldIdLst>
@@ -3315,7 +3314,7 @@
                 </a:solidFill>
                 <a:latin typeface="Calibri"/>
               </a:rPr>
-              <a:t>flowgridos.co.uk/partners</a:t>
+              <a:t>flowgridos.co.uk</a:t>
             </a:r>
           </a:p>
         </p:txBody>
@@ -3453,7 +3452,7 @@
               </a:defRPr>
             </a:pPr>
             <a:r>
-              <a:t>• SMBs want one AI bill and their own brand — not a patchwork of tools.</a:t>
+              <a:t>• Charities, trusts and SMEs want cited answers and structured work, not a patchwork of AI tools.</a:t>
             </a:r>
           </a:p>
           <a:p>
@@ -3526,7 +3525,7 @@
                 </a:solidFill>
                 <a:latin typeface="Calibri"/>
               </a:rPr>
-              <a:t>flowgridos.co.uk/partners</a:t>
+              <a:t>flowgridos.co.uk</a:t>
             </a:r>
           </a:p>
         </p:txBody>
@@ -3664,7 +3663,7 @@
               </a:defRPr>
             </a:pPr>
             <a:r>
-              <a:t>• Brand layer — tenant logo, accent and white-label shell.</a:t>
+              <a:t>• Brand layer: client logo, colours and branded outputs.</a:t>
             </a:r>
           </a:p>
           <a:p>
@@ -3702,7 +3701,7 @@
               </a:defRPr>
             </a:pPr>
             <a:r>
-              <a:t>• Vault &amp; RAG — cited retrieval with per-tenant database isolation.</a:t>
+              <a:t>• Vault &amp; confirmed facts: cited answers, with each client isolated at the database level.</a:t>
             </a:r>
           </a:p>
           <a:p>
@@ -3721,7 +3720,7 @@
               </a:defRPr>
             </a:pPr>
             <a:r>
-              <a:t>• Modules — chat, research, slides, CRM and project spine.</a:t>
+              <a:t>• Modules: projects, exports and sector modules (Groundwork and Grantwork, available in pilot).</a:t>
             </a:r>
           </a:p>
         </p:txBody>
@@ -3756,7 +3755,7 @@
                 </a:solidFill>
                 <a:latin typeface="Calibri"/>
               </a:rPr>
-              <a:t>flowgridos.co.uk/partners</a:t>
+              <a:t>flowgridos.co.uk</a:t>
             </a:r>
           </a:p>
         </p:txBody>
@@ -3894,7 +3893,7 @@
               </a:defRPr>
             </a:pPr>
             <a:r>
-              <a:t>• High recurring margins: ~89% Core, ~88% Pro, ~70% Managed after support labour.</a:t>
+              <a:t>• Recurring revenue: per-seat subscriptions with margin you keep. Economics are shared on a partner call.</a:t>
             </a:r>
           </a:p>
           <a:p>
@@ -3954,345 +3953,6 @@
               <a:t>• Fast to deploy: new branded workspaces provisioned in minutes.</a:t>
             </a:r>
           </a:p>
-        </p:txBody>
-      </p:sp>
-      <p:sp>
-        <p:nvSpPr>
-          <p:cNvPr id="5" name="TextBox 4"/>
-          <p:cNvSpPr txBox="1"/>
-          <p:nvPr/>
-        </p:nvSpPr>
-        <p:spPr>
-          <a:xfrm>
-            <a:off x="548640" y="6537960"/>
-            <a:ext cx="11094415" cy="228600"/>
-          </a:xfrm>
-          <a:prstGeom prst="rect">
-            <a:avLst/>
-          </a:prstGeom>
-          <a:noFill/>
-        </p:spPr>
-        <p:txBody>
-          <a:bodyPr wrap="square">
-            <a:spAutoFit/>
-          </a:bodyPr>
-          <a:lstStyle/>
-          <a:p>
-            <a:pPr algn="r"/>
-            <a:r>
-              <a:rPr sz="1000" b="0">
-                <a:solidFill>
-                  <a:srgbClr val="5B5752"/>
-                </a:solidFill>
-                <a:latin typeface="Calibri"/>
-              </a:rPr>
-              <a:t>flowgridos.co.uk/partners</a:t>
-            </a:r>
-          </a:p>
-        </p:txBody>
-      </p:sp>
-    </p:spTree>
-  </p:cSld>
-  <p:clrMapOvr>
-    <a:masterClrMapping/>
-  </p:clrMapOvr>
-</p:sld>
-</file>
-
-<file path=ppt/slides/slide5.xml><?xml version="1.0" encoding="utf-8"?>
-<p:sld xmlns:a="http://schemas.openxmlformats.org/drawingml/2006/main" xmlns:p="http://schemas.openxmlformats.org/presentationml/2006/main" xmlns:r="http://schemas.openxmlformats.org/officeDocument/2006/relationships">
-  <p:cSld>
-    <p:spTree>
-      <p:nvGrpSpPr>
-        <p:cNvPr id="1" name=""/>
-        <p:cNvGrpSpPr/>
-        <p:nvPr/>
-      </p:nvGrpSpPr>
-      <p:grpSpPr/>
-      <p:sp>
-        <p:nvSpPr>
-          <p:cNvPr id="2" name="Rectangle 1"/>
-          <p:cNvSpPr/>
-          <p:nvPr/>
-        </p:nvSpPr>
-        <p:spPr>
-          <a:xfrm>
-            <a:off x="0" y="0"/>
-            <a:ext cx="12191695" cy="1005840"/>
-          </a:xfrm>
-          <a:prstGeom prst="rect">
-            <a:avLst/>
-          </a:prstGeom>
-          <a:solidFill>
-            <a:srgbClr val="B14E2E"/>
-          </a:solidFill>
-          <a:ln>
-            <a:noFill/>
-          </a:ln>
-        </p:spPr>
-        <p:style>
-          <a:lnRef idx="1">
-            <a:schemeClr val="accent1"/>
-          </a:lnRef>
-          <a:fillRef idx="3">
-            <a:schemeClr val="accent1"/>
-          </a:fillRef>
-          <a:effectRef idx="2">
-            <a:schemeClr val="accent1"/>
-          </a:effectRef>
-          <a:fontRef idx="minor">
-            <a:schemeClr val="lt1"/>
-          </a:fontRef>
-        </p:style>
-        <p:txBody>
-          <a:bodyPr rtlCol="0" anchor="ctr"/>
-          <a:lstStyle/>
-          <a:p>
-            <a:pPr algn="ctr"/>
-          </a:p>
-        </p:txBody>
-      </p:sp>
-      <p:sp>
-        <p:nvSpPr>
-          <p:cNvPr id="3" name="TextBox 2"/>
-          <p:cNvSpPr txBox="1"/>
-          <p:nvPr/>
-        </p:nvSpPr>
-        <p:spPr>
-          <a:xfrm>
-            <a:off x="548640" y="201168"/>
-            <a:ext cx="11094415" cy="731520"/>
-          </a:xfrm>
-          <a:prstGeom prst="rect">
-            <a:avLst/>
-          </a:prstGeom>
-          <a:noFill/>
-        </p:spPr>
-        <p:txBody>
-          <a:bodyPr wrap="square">
-            <a:spAutoFit/>
-          </a:bodyPr>
-          <a:lstStyle/>
-          <a:p>
-            <a:pPr algn="l"/>
-            <a:r>
-              <a:rPr sz="3400" b="1">
-                <a:solidFill>
-                  <a:srgbClr val="FFFFFF"/>
-                </a:solidFill>
-                <a:latin typeface="Georgia"/>
-              </a:rPr>
-              <a:t>Partner economics</a:t>
-            </a:r>
-          </a:p>
-        </p:txBody>
-      </p:sp>
-      <p:sp>
-        <p:nvSpPr>
-          <p:cNvPr id="4" name="Rounded Rectangle 3"/>
-          <p:cNvSpPr/>
-          <p:nvPr/>
-        </p:nvSpPr>
-        <p:spPr>
-          <a:xfrm>
-            <a:off x="548640" y="1325880"/>
-            <a:ext cx="3515258" cy="4572000"/>
-          </a:xfrm>
-          <a:prstGeom prst="roundRect">
-            <a:avLst/>
-          </a:prstGeom>
-          <a:solidFill>
-            <a:srgbClr val="F6F2ED"/>
-          </a:solidFill>
-          <a:ln w="25400">
-            <a:solidFill>
-              <a:srgbClr val="B14E2E"/>
-            </a:solidFill>
-          </a:ln>
-        </p:spPr>
-        <p:style>
-          <a:lnRef idx="1">
-            <a:schemeClr val="accent1"/>
-          </a:lnRef>
-          <a:fillRef idx="3">
-            <a:schemeClr val="accent1"/>
-          </a:fillRef>
-          <a:effectRef idx="2">
-            <a:schemeClr val="accent1"/>
-          </a:effectRef>
-          <a:fontRef idx="minor">
-            <a:schemeClr val="lt1"/>
-          </a:fontRef>
-        </p:style>
-        <p:txBody>
-          <a:bodyPr rtlCol="0" anchor="ctr"/>
-          <a:lstStyle/>
-          <a:p>
-            <a:pPr algn="ctr"/>
-          </a:p>
-        </p:txBody>
-      </p:sp>
-      <p:sp>
-        <p:nvSpPr>
-          <p:cNvPr id="5" name="TextBox 4"/>
-          <p:cNvSpPr txBox="1"/>
-          <p:nvPr/>
-        </p:nvSpPr>
-        <p:spPr>
-          <a:xfrm>
-            <a:off x="685800" y="1463040"/>
-            <a:ext cx="3240938" cy="457200"/>
-          </a:xfrm>
-          <a:prstGeom prst="rect">
-            <a:avLst/>
-          </a:prstGeom>
-          <a:noFill/>
-        </p:spPr>
-        <p:txBody>
-          <a:bodyPr wrap="square">
-            <a:spAutoFit/>
-          </a:bodyPr>
-          <a:lstStyle/>
-          <a:p>
-            <a:pPr algn="ctr"/>
-            <a:r>
-              <a:rPr sz="2200" b="1">
-                <a:solidFill>
-                  <a:srgbClr val="B14E2E"/>
-                </a:solidFill>
-                <a:latin typeface="Georgia"/>
-              </a:rPr>
-              <a:t>Core</a:t>
-            </a:r>
-          </a:p>
-        </p:txBody>
-      </p:sp>
-      <p:sp>
-        <p:nvSpPr>
-          <p:cNvPr id="6" name="TextBox 5"/>
-          <p:cNvSpPr txBox="1"/>
-          <p:nvPr/>
-        </p:nvSpPr>
-        <p:spPr>
-          <a:xfrm>
-            <a:off x="685800" y="1965960"/>
-            <a:ext cx="3240938" cy="548640"/>
-          </a:xfrm>
-          <a:prstGeom prst="rect">
-            <a:avLst/>
-          </a:prstGeom>
-          <a:noFill/>
-        </p:spPr>
-        <p:txBody>
-          <a:bodyPr wrap="square">
-            <a:spAutoFit/>
-          </a:bodyPr>
-          <a:lstStyle/>
-          <a:p>
-            <a:pPr algn="ctr"/>
-            <a:r>
-              <a:rPr sz="3200" b="1">
-                <a:solidFill>
-                  <a:srgbClr val="B14E2E"/>
-                </a:solidFill>
-                <a:latin typeface="Calibri"/>
-              </a:rPr>
-              <a:t>£29</a:t>
-            </a:r>
-          </a:p>
-        </p:txBody>
-      </p:sp>
-      <p:sp>
-        <p:nvSpPr>
-          <p:cNvPr id="7" name="TextBox 6"/>
-          <p:cNvSpPr txBox="1"/>
-          <p:nvPr/>
-        </p:nvSpPr>
-        <p:spPr>
-          <a:xfrm>
-            <a:off x="685800" y="2468880"/>
-            <a:ext cx="3240938" cy="320040"/>
-          </a:xfrm>
-          <a:prstGeom prst="rect">
-            <a:avLst/>
-          </a:prstGeom>
-          <a:noFill/>
-        </p:spPr>
-        <p:txBody>
-          <a:bodyPr wrap="square">
-            <a:spAutoFit/>
-          </a:bodyPr>
-          <a:lstStyle/>
-          <a:p>
-            <a:pPr algn="ctr"/>
-            <a:r>
-              <a:rPr sz="1200" b="0">
-                <a:solidFill>
-                  <a:srgbClr val="2D2A26"/>
-                </a:solidFill>
-                <a:latin typeface="Calibri"/>
-              </a:rPr>
-              <a:t>/seat/mo · min 3</a:t>
-            </a:r>
-          </a:p>
-        </p:txBody>
-      </p:sp>
-      <p:sp>
-        <p:nvSpPr>
-          <p:cNvPr id="8" name="TextBox 7"/>
-          <p:cNvSpPr txBox="1"/>
-          <p:nvPr/>
-        </p:nvSpPr>
-        <p:spPr>
-          <a:xfrm>
-            <a:off x="685800" y="2788920"/>
-            <a:ext cx="3240938" cy="365760"/>
-          </a:xfrm>
-          <a:prstGeom prst="rect">
-            <a:avLst/>
-          </a:prstGeom>
-          <a:noFill/>
-        </p:spPr>
-        <p:txBody>
-          <a:bodyPr wrap="square">
-            <a:spAutoFit/>
-          </a:bodyPr>
-          <a:lstStyle/>
-          <a:p>
-            <a:pPr algn="ctr"/>
-            <a:r>
-              <a:rPr sz="1500" b="1">
-                <a:solidFill>
-                  <a:srgbClr val="6B8E6B"/>
-                </a:solidFill>
-                <a:latin typeface="Calibri"/>
-              </a:rPr>
-              <a:t>~89% gross margin</a:t>
-            </a:r>
-          </a:p>
-        </p:txBody>
-      </p:sp>
-      <p:sp>
-        <p:nvSpPr>
-          <p:cNvPr id="9" name="TextBox 8"/>
-          <p:cNvSpPr txBox="1"/>
-          <p:nvPr/>
-        </p:nvSpPr>
-        <p:spPr>
-          <a:xfrm>
-            <a:off x="731520" y="3291840"/>
-            <a:ext cx="3149498" cy="2468880"/>
-          </a:xfrm>
-          <a:prstGeom prst="rect">
-            <a:avLst/>
-          </a:prstGeom>
-          <a:noFill/>
-        </p:spPr>
-        <p:txBody>
-          <a:bodyPr wrap="square" anchor="t">
-            <a:spAutoFit/>
-          </a:bodyPr>
-          <a:lstStyle/>
           <a:p>
             <a:pPr>
               <a:lnSpc>
@@ -4301,7 +3961,7 @@
               <a:spcAft>
                 <a:spcPts val="1000"/>
               </a:spcAft>
-              <a:defRPr sz="1400">
+              <a:defRPr sz="2200">
                 <a:solidFill>
                   <a:srgbClr val="2D2A26"/>
                 </a:solidFill>
@@ -4309,123 +3969,21 @@
               </a:defRPr>
             </a:pPr>
             <a:r>
-              <a:t>• Workspace, vault &amp; chat</a:t>
-            </a:r>
-          </a:p>
-          <a:p>
-            <a:pPr>
-              <a:lnSpc>
-                <a:spcPct val="120000"/>
-              </a:lnSpc>
-              <a:spcAft>
-                <a:spcPts val="1000"/>
-              </a:spcAft>
-              <a:defRPr sz="1400">
-                <a:solidFill>
-                  <a:srgbClr val="2D2A26"/>
-                </a:solidFill>
-                <a:latin typeface="Calibri"/>
-              </a:defRPr>
-            </a:pPr>
-            <a:r>
-              <a:t>• Research &amp; slide export</a:t>
-            </a:r>
-          </a:p>
-          <a:p>
-            <a:pPr>
-              <a:lnSpc>
-                <a:spcPct val="120000"/>
-              </a:lnSpc>
-              <a:spcAft>
-                <a:spcPts val="1000"/>
-              </a:spcAft>
-              <a:defRPr sz="1400">
-                <a:solidFill>
-                  <a:srgbClr val="2D2A26"/>
-                </a:solidFill>
-                <a:latin typeface="Calibri"/>
-              </a:defRPr>
-            </a:pPr>
-            <a:r>
-              <a:t>• CRM contacts</a:t>
-            </a:r>
-          </a:p>
-          <a:p>
-            <a:pPr>
-              <a:lnSpc>
-                <a:spcPct val="120000"/>
-              </a:lnSpc>
-              <a:spcAft>
-                <a:spcPts val="1000"/>
-              </a:spcAft>
-              <a:defRPr sz="1400">
-                <a:solidFill>
-                  <a:srgbClr val="2D2A26"/>
-                </a:solidFill>
-                <a:latin typeface="Calibri"/>
-              </a:defRPr>
-            </a:pPr>
-            <a:r>
-              <a:t>• Self-serve support</a:t>
-            </a:r>
-          </a:p>
-        </p:txBody>
-      </p:sp>
-      <p:sp>
-        <p:nvSpPr>
-          <p:cNvPr id="10" name="Rounded Rectangle 9"/>
-          <p:cNvSpPr/>
-          <p:nvPr/>
-        </p:nvSpPr>
-        <p:spPr>
-          <a:xfrm>
-            <a:off x="4338218" y="1325880"/>
-            <a:ext cx="3515258" cy="4572000"/>
-          </a:xfrm>
-          <a:prstGeom prst="roundRect">
-            <a:avLst/>
-          </a:prstGeom>
-          <a:solidFill>
-            <a:srgbClr val="B14E2E"/>
-          </a:solidFill>
-          <a:ln w="25400">
-            <a:solidFill>
-              <a:srgbClr val="B14E2E"/>
-            </a:solidFill>
-          </a:ln>
-        </p:spPr>
-        <p:style>
-          <a:lnRef idx="1">
-            <a:schemeClr val="accent1"/>
-          </a:lnRef>
-          <a:fillRef idx="3">
-            <a:schemeClr val="accent1"/>
-          </a:fillRef>
-          <a:effectRef idx="2">
-            <a:schemeClr val="accent1"/>
-          </a:effectRef>
-          <a:fontRef idx="minor">
-            <a:schemeClr val="lt1"/>
-          </a:fontRef>
-        </p:style>
-        <p:txBody>
-          <a:bodyPr rtlCol="0" anchor="ctr"/>
-          <a:lstStyle/>
-          <a:p>
-            <a:pPr algn="ctr"/>
-          </a:p>
-        </p:txBody>
-      </p:sp>
-      <p:sp>
-        <p:nvSpPr>
-          <p:cNvPr id="11" name="TextBox 10"/>
+              <a:t>• Pilot first: we are onboarding in small pilot groups, so places are limited.</a:t>
+            </a:r>
+          </a:p>
+        </p:txBody>
+      </p:sp>
+      <p:sp>
+        <p:nvSpPr>
+          <p:cNvPr id="5" name="TextBox 4"/>
           <p:cNvSpPr txBox="1"/>
           <p:nvPr/>
         </p:nvSpPr>
         <p:spPr>
           <a:xfrm>
-            <a:off x="4475378" y="1463040"/>
-            <a:ext cx="3240938" cy="457200"/>
+            <a:off x="548640" y="6537960"/>
+            <a:ext cx="11094415" cy="228600"/>
           </a:xfrm>
           <a:prstGeom prst="rect">
             <a:avLst/>
@@ -4438,538 +3996,15 @@
           </a:bodyPr>
           <a:lstStyle/>
           <a:p>
-            <a:pPr algn="ctr"/>
-            <a:r>
-              <a:rPr sz="2200" b="1">
-                <a:solidFill>
-                  <a:srgbClr val="FFFFFF"/>
-                </a:solidFill>
-                <a:latin typeface="Georgia"/>
-              </a:rPr>
-              <a:t>Pro</a:t>
-            </a:r>
-          </a:p>
-        </p:txBody>
-      </p:sp>
-      <p:sp>
-        <p:nvSpPr>
-          <p:cNvPr id="12" name="TextBox 11"/>
-          <p:cNvSpPr txBox="1"/>
-          <p:nvPr/>
-        </p:nvSpPr>
-        <p:spPr>
-          <a:xfrm>
-            <a:off x="4475378" y="1965960"/>
-            <a:ext cx="3240938" cy="548640"/>
-          </a:xfrm>
-          <a:prstGeom prst="rect">
-            <a:avLst/>
-          </a:prstGeom>
-          <a:noFill/>
-        </p:spPr>
-        <p:txBody>
-          <a:bodyPr wrap="square">
-            <a:spAutoFit/>
-          </a:bodyPr>
-          <a:lstStyle/>
-          <a:p>
-            <a:pPr algn="ctr"/>
-            <a:r>
-              <a:rPr sz="3200" b="1">
-                <a:solidFill>
-                  <a:srgbClr val="FFFFFF"/>
+            <a:pPr algn="r"/>
+            <a:r>
+              <a:rPr sz="1000" b="0">
+                <a:solidFill>
+                  <a:srgbClr val="5B5752"/>
                 </a:solidFill>
                 <a:latin typeface="Calibri"/>
               </a:rPr>
-              <a:t>£49</a:t>
-            </a:r>
-          </a:p>
-        </p:txBody>
-      </p:sp>
-      <p:sp>
-        <p:nvSpPr>
-          <p:cNvPr id="13" name="TextBox 12"/>
-          <p:cNvSpPr txBox="1"/>
-          <p:nvPr/>
-        </p:nvSpPr>
-        <p:spPr>
-          <a:xfrm>
-            <a:off x="4475378" y="2468880"/>
-            <a:ext cx="3240938" cy="320040"/>
-          </a:xfrm>
-          <a:prstGeom prst="rect">
-            <a:avLst/>
-          </a:prstGeom>
-          <a:noFill/>
-        </p:spPr>
-        <p:txBody>
-          <a:bodyPr wrap="square">
-            <a:spAutoFit/>
-          </a:bodyPr>
-          <a:lstStyle/>
-          <a:p>
-            <a:pPr algn="ctr"/>
-            <a:r>
-              <a:rPr sz="1200" b="0">
-                <a:solidFill>
-                  <a:srgbClr val="FFFFFF"/>
-                </a:solidFill>
-                <a:latin typeface="Calibri"/>
-              </a:rPr>
-              <a:t>/seat/mo</a:t>
-            </a:r>
-          </a:p>
-        </p:txBody>
-      </p:sp>
-      <p:sp>
-        <p:nvSpPr>
-          <p:cNvPr id="14" name="TextBox 13"/>
-          <p:cNvSpPr txBox="1"/>
-          <p:nvPr/>
-        </p:nvSpPr>
-        <p:spPr>
-          <a:xfrm>
-            <a:off x="4475378" y="2788920"/>
-            <a:ext cx="3240938" cy="365760"/>
-          </a:xfrm>
-          <a:prstGeom prst="rect">
-            <a:avLst/>
-          </a:prstGeom>
-          <a:noFill/>
-        </p:spPr>
-        <p:txBody>
-          <a:bodyPr wrap="square">
-            <a:spAutoFit/>
-          </a:bodyPr>
-          <a:lstStyle/>
-          <a:p>
-            <a:pPr algn="ctr"/>
-            <a:r>
-              <a:rPr sz="1500" b="1">
-                <a:solidFill>
-                  <a:srgbClr val="FFFFFF"/>
-                </a:solidFill>
-                <a:latin typeface="Calibri"/>
-              </a:rPr>
-              <a:t>~88% gross margin</a:t>
-            </a:r>
-          </a:p>
-        </p:txBody>
-      </p:sp>
-      <p:sp>
-        <p:nvSpPr>
-          <p:cNvPr id="15" name="TextBox 14"/>
-          <p:cNvSpPr txBox="1"/>
-          <p:nvPr/>
-        </p:nvSpPr>
-        <p:spPr>
-          <a:xfrm>
-            <a:off x="4521098" y="3291840"/>
-            <a:ext cx="3149498" cy="2468880"/>
-          </a:xfrm>
-          <a:prstGeom prst="rect">
-            <a:avLst/>
-          </a:prstGeom>
-          <a:noFill/>
-        </p:spPr>
-        <p:txBody>
-          <a:bodyPr wrap="square" anchor="t">
-            <a:spAutoFit/>
-          </a:bodyPr>
-          <a:lstStyle/>
-          <a:p>
-            <a:pPr>
-              <a:lnSpc>
-                <a:spcPct val="120000"/>
-              </a:lnSpc>
-              <a:spcAft>
-                <a:spcPts val="1000"/>
-              </a:spcAft>
-              <a:defRPr sz="1400">
-                <a:solidFill>
-                  <a:srgbClr val="FFFFFF"/>
-                </a:solidFill>
-                <a:latin typeface="Calibri"/>
-              </a:defRPr>
-            </a:pPr>
-            <a:r>
-              <a:t>• Everything in Core</a:t>
-            </a:r>
-          </a:p>
-          <a:p>
-            <a:pPr>
-              <a:lnSpc>
-                <a:spcPct val="120000"/>
-              </a:lnSpc>
-              <a:spcAft>
-                <a:spcPts val="1000"/>
-              </a:spcAft>
-              <a:defRPr sz="1400">
-                <a:solidFill>
-                  <a:srgbClr val="FFFFFF"/>
-                </a:solidFill>
-                <a:latin typeface="Calibri"/>
-              </a:defRPr>
-            </a:pPr>
-            <a:r>
-              <a:t>• Premium reasoning</a:t>
-            </a:r>
-          </a:p>
-          <a:p>
-            <a:pPr>
-              <a:lnSpc>
-                <a:spcPct val="120000"/>
-              </a:lnSpc>
-              <a:spcAft>
-                <a:spcPts val="1000"/>
-              </a:spcAft>
-              <a:defRPr sz="1400">
-                <a:solidFill>
-                  <a:srgbClr val="FFFFFF"/>
-                </a:solidFill>
-                <a:latin typeface="Calibri"/>
-              </a:defRPr>
-            </a:pPr>
-            <a:r>
-              <a:t>• Deep research</a:t>
-            </a:r>
-          </a:p>
-          <a:p>
-            <a:pPr>
-              <a:lnSpc>
-                <a:spcPct val="120000"/>
-              </a:lnSpc>
-              <a:spcAft>
-                <a:spcPts val="1000"/>
-              </a:spcAft>
-              <a:defRPr sz="1400">
-                <a:solidFill>
-                  <a:srgbClr val="FFFFFF"/>
-                </a:solidFill>
-                <a:latin typeface="Calibri"/>
-              </a:defRPr>
-            </a:pPr>
-            <a:r>
-              <a:t>• Advanced reporting</a:t>
-            </a:r>
-          </a:p>
-        </p:txBody>
-      </p:sp>
-      <p:sp>
-        <p:nvSpPr>
-          <p:cNvPr id="16" name="Rounded Rectangle 15"/>
-          <p:cNvSpPr/>
-          <p:nvPr/>
-        </p:nvSpPr>
-        <p:spPr>
-          <a:xfrm>
-            <a:off x="8127796" y="1325880"/>
-            <a:ext cx="3515258" cy="4572000"/>
-          </a:xfrm>
-          <a:prstGeom prst="roundRect">
-            <a:avLst/>
-          </a:prstGeom>
-          <a:solidFill>
-            <a:srgbClr val="F6F2ED"/>
-          </a:solidFill>
-          <a:ln w="25400">
-            <a:solidFill>
-              <a:srgbClr val="B14E2E"/>
-            </a:solidFill>
-          </a:ln>
-        </p:spPr>
-        <p:style>
-          <a:lnRef idx="1">
-            <a:schemeClr val="accent1"/>
-          </a:lnRef>
-          <a:fillRef idx="3">
-            <a:schemeClr val="accent1"/>
-          </a:fillRef>
-          <a:effectRef idx="2">
-            <a:schemeClr val="accent1"/>
-          </a:effectRef>
-          <a:fontRef idx="minor">
-            <a:schemeClr val="lt1"/>
-          </a:fontRef>
-        </p:style>
-        <p:txBody>
-          <a:bodyPr rtlCol="0" anchor="ctr"/>
-          <a:lstStyle/>
-          <a:p>
-            <a:pPr algn="ctr"/>
-          </a:p>
-        </p:txBody>
-      </p:sp>
-      <p:sp>
-        <p:nvSpPr>
-          <p:cNvPr id="17" name="TextBox 16"/>
-          <p:cNvSpPr txBox="1"/>
-          <p:nvPr/>
-        </p:nvSpPr>
-        <p:spPr>
-          <a:xfrm>
-            <a:off x="8264956" y="1463040"/>
-            <a:ext cx="3240938" cy="457200"/>
-          </a:xfrm>
-          <a:prstGeom prst="rect">
-            <a:avLst/>
-          </a:prstGeom>
-          <a:noFill/>
-        </p:spPr>
-        <p:txBody>
-          <a:bodyPr wrap="square">
-            <a:spAutoFit/>
-          </a:bodyPr>
-          <a:lstStyle/>
-          <a:p>
-            <a:pPr algn="ctr"/>
-            <a:r>
-              <a:rPr sz="2200" b="1">
-                <a:solidFill>
-                  <a:srgbClr val="B14E2E"/>
-                </a:solidFill>
-                <a:latin typeface="Georgia"/>
-              </a:rPr>
-              <a:t>Managed</a:t>
-            </a:r>
-          </a:p>
-        </p:txBody>
-      </p:sp>
-      <p:sp>
-        <p:nvSpPr>
-          <p:cNvPr id="18" name="TextBox 17"/>
-          <p:cNvSpPr txBox="1"/>
-          <p:nvPr/>
-        </p:nvSpPr>
-        <p:spPr>
-          <a:xfrm>
-            <a:off x="8264956" y="1965960"/>
-            <a:ext cx="3240938" cy="548640"/>
-          </a:xfrm>
-          <a:prstGeom prst="rect">
-            <a:avLst/>
-          </a:prstGeom>
-          <a:noFill/>
-        </p:spPr>
-        <p:txBody>
-          <a:bodyPr wrap="square">
-            <a:spAutoFit/>
-          </a:bodyPr>
-          <a:lstStyle/>
-          <a:p>
-            <a:pPr algn="ctr"/>
-            <a:r>
-              <a:rPr sz="3200" b="1">
-                <a:solidFill>
-                  <a:srgbClr val="B14E2E"/>
-                </a:solidFill>
-                <a:latin typeface="Calibri"/>
-              </a:rPr>
-              <a:t>£799</a:t>
-            </a:r>
-          </a:p>
-        </p:txBody>
-      </p:sp>
-      <p:sp>
-        <p:nvSpPr>
-          <p:cNvPr id="19" name="TextBox 18"/>
-          <p:cNvSpPr txBox="1"/>
-          <p:nvPr/>
-        </p:nvSpPr>
-        <p:spPr>
-          <a:xfrm>
-            <a:off x="8264956" y="2468880"/>
-            <a:ext cx="3240938" cy="320040"/>
-          </a:xfrm>
-          <a:prstGeom prst="rect">
-            <a:avLst/>
-          </a:prstGeom>
-          <a:noFill/>
-        </p:spPr>
-        <p:txBody>
-          <a:bodyPr wrap="square">
-            <a:spAutoFit/>
-          </a:bodyPr>
-          <a:lstStyle/>
-          <a:p>
-            <a:pPr algn="ctr"/>
-            <a:r>
-              <a:rPr sz="1200" b="0">
-                <a:solidFill>
-                  <a:srgbClr val="2D2A26"/>
-                </a:solidFill>
-                <a:latin typeface="Calibri"/>
-              </a:rPr>
-              <a:t>/mo + £1,500 onboarding</a:t>
-            </a:r>
-          </a:p>
-        </p:txBody>
-      </p:sp>
-      <p:sp>
-        <p:nvSpPr>
-          <p:cNvPr id="20" name="TextBox 19"/>
-          <p:cNvSpPr txBox="1"/>
-          <p:nvPr/>
-        </p:nvSpPr>
-        <p:spPr>
-          <a:xfrm>
-            <a:off x="8264956" y="2788920"/>
-            <a:ext cx="3240938" cy="365760"/>
-          </a:xfrm>
-          <a:prstGeom prst="rect">
-            <a:avLst/>
-          </a:prstGeom>
-          <a:noFill/>
-        </p:spPr>
-        <p:txBody>
-          <a:bodyPr wrap="square">
-            <a:spAutoFit/>
-          </a:bodyPr>
-          <a:lstStyle/>
-          <a:p>
-            <a:pPr algn="ctr"/>
-            <a:r>
-              <a:rPr sz="1500" b="1">
-                <a:solidFill>
-                  <a:srgbClr val="6B8E6B"/>
-                </a:solidFill>
-                <a:latin typeface="Calibri"/>
-              </a:rPr>
-              <a:t>~70% margin after labour</a:t>
-            </a:r>
-          </a:p>
-        </p:txBody>
-      </p:sp>
-      <p:sp>
-        <p:nvSpPr>
-          <p:cNvPr id="21" name="TextBox 20"/>
-          <p:cNvSpPr txBox="1"/>
-          <p:nvPr/>
-        </p:nvSpPr>
-        <p:spPr>
-          <a:xfrm>
-            <a:off x="8310676" y="3291840"/>
-            <a:ext cx="3149498" cy="2468880"/>
-          </a:xfrm>
-          <a:prstGeom prst="rect">
-            <a:avLst/>
-          </a:prstGeom>
-          <a:noFill/>
-        </p:spPr>
-        <p:txBody>
-          <a:bodyPr wrap="square" anchor="t">
-            <a:spAutoFit/>
-          </a:bodyPr>
-          <a:lstStyle/>
-          <a:p>
-            <a:pPr>
-              <a:lnSpc>
-                <a:spcPct val="120000"/>
-              </a:lnSpc>
-              <a:spcAft>
-                <a:spcPts val="1000"/>
-              </a:spcAft>
-              <a:defRPr sz="1400">
-                <a:solidFill>
-                  <a:srgbClr val="2D2A26"/>
-                </a:solidFill>
-                <a:latin typeface="Calibri"/>
-              </a:defRPr>
-            </a:pPr>
-            <a:r>
-              <a:t>• Includes 10 Pro seats</a:t>
-            </a:r>
-          </a:p>
-          <a:p>
-            <a:pPr>
-              <a:lnSpc>
-                <a:spcPct val="120000"/>
-              </a:lnSpc>
-              <a:spcAft>
-                <a:spcPts val="1000"/>
-              </a:spcAft>
-              <a:defRPr sz="1400">
-                <a:solidFill>
-                  <a:srgbClr val="2D2A26"/>
-                </a:solidFill>
-                <a:latin typeface="Calibri"/>
-              </a:defRPr>
-            </a:pPr>
-            <a:r>
-              <a:t>• White-glove onboarding</a:t>
-            </a:r>
-          </a:p>
-          <a:p>
-            <a:pPr>
-              <a:lnSpc>
-                <a:spcPct val="120000"/>
-              </a:lnSpc>
-              <a:spcAft>
-                <a:spcPts val="1000"/>
-              </a:spcAft>
-              <a:defRPr sz="1400">
-                <a:solidFill>
-                  <a:srgbClr val="2D2A26"/>
-                </a:solidFill>
-                <a:latin typeface="Calibri"/>
-              </a:defRPr>
-            </a:pPr>
-            <a:r>
-              <a:t>• Quarterly reviews &amp; SLA</a:t>
-            </a:r>
-          </a:p>
-          <a:p>
-            <a:pPr>
-              <a:lnSpc>
-                <a:spcPct val="120000"/>
-              </a:lnSpc>
-              <a:spcAft>
-                <a:spcPts val="1000"/>
-              </a:spcAft>
-              <a:defRPr sz="1400">
-                <a:solidFill>
-                  <a:srgbClr val="2D2A26"/>
-                </a:solidFill>
-                <a:latin typeface="Calibri"/>
-              </a:defRPr>
-            </a:pPr>
-            <a:r>
-              <a:t>• +£39/extra seat</a:t>
-            </a:r>
-          </a:p>
-        </p:txBody>
-      </p:sp>
-      <p:sp>
-        <p:nvSpPr>
-          <p:cNvPr id="22" name="TextBox 21"/>
-          <p:cNvSpPr txBox="1"/>
-          <p:nvPr/>
-        </p:nvSpPr>
-        <p:spPr>
-          <a:xfrm>
-            <a:off x="548640" y="6537960"/>
-            <a:ext cx="11094415" cy="228600"/>
-          </a:xfrm>
-          <a:prstGeom prst="rect">
-            <a:avLst/>
-          </a:prstGeom>
-          <a:noFill/>
-        </p:spPr>
-        <p:txBody>
-          <a:bodyPr wrap="square">
-            <a:spAutoFit/>
-          </a:bodyPr>
-          <a:lstStyle/>
-          <a:p>
-            <a:pPr algn="r"/>
-            <a:r>
-              <a:rPr sz="1000" b="0">
-                <a:solidFill>
-                  <a:srgbClr val="5B5752"/>
-                </a:solidFill>
-                <a:latin typeface="Calibri"/>
-              </a:rPr>
-              <a:t>flowgridos.co.uk/partners</a:t>
+              <a:t>flowgridos.co.uk</a:t>
             </a:r>
           </a:p>
         </p:txBody>
@@ -5258,7 +4293,7 @@
                 </a:solidFill>
                 <a:latin typeface="Calibri"/>
               </a:rPr>
-              <a:t>Pick tier &amp; collect brand assets.</a:t>
+              <a:t>Agree scope &amp; collect brand assets.</a:t>
             </a:r>
           </a:p>
         </p:txBody>
@@ -5644,7 +4679,7 @@
                 </a:solidFill>
                 <a:latin typeface="Calibri"/>
               </a:rPr>
-              <a:t>Upload docs, run onboarding, set caps.</a:t>
+              <a:t>Upload docs, run onboarding, set spending limits.</a:t>
             </a:r>
           </a:p>
         </p:txBody>
@@ -5837,7 +4872,7 @@
                 </a:solidFill>
                 <a:latin typeface="Calibri"/>
               </a:rPr>
-              <a:t>You invoice client; we invoice you for COGS.</a:t>
+              <a:t>You invoice the client; we invoice you.</a:t>
             </a:r>
           </a:p>
         </p:txBody>
@@ -5872,7 +4907,7 @@
                 </a:solidFill>
                 <a:latin typeface="Calibri"/>
               </a:rPr>
-              <a:t>flowgridos.co.uk/partners</a:t>
+              <a:t>flowgridos.co.uk</a:t>
             </a:r>
           </a:p>
         </p:txBody>
@@ -6038,7 +5073,7 @@
                 </a:solidFill>
                 <a:latin typeface="Calibri"/>
               </a:rPr>
-              <a:t>partners@flowgridos.co.uk</a:t>
+              <a:t>clive@platform91.com</a:t>
             </a:r>
           </a:p>
         </p:txBody>
@@ -6073,7 +5108,7 @@
                 </a:solidFill>
                 <a:latin typeface="Calibri"/>
               </a:rPr>
-              <a:t>flowgridos.co.uk/partners</a:t>
+              <a:t>flowgridos.co.uk</a:t>
             </a:r>
           </a:p>
         </p:txBody>

--- a/docs/flowgrid-os-partner-deck.pptx
+++ b/docs/flowgrid-os-partner-deck.pptx
@@ -9,8 +9,8 @@
     <p:sldId id="257" r:id="rId8"/>
     <p:sldId id="258" r:id="rId9"/>
     <p:sldId id="259" r:id="rId10"/>
+    <p:sldId id="260" r:id="rId11"/>
     <p:sldId id="261" r:id="rId12"/>
-    <p:sldId id="262" r:id="rId13"/>
   </p:sldIdLst>
   <p:sldSz cx="12191695" cy="6858000" type="screen4x3"/>
   <p:notesSz cx="6858000" cy="9144000"/>
@@ -4017,7 +4017,7 @@
 </p:sld>
 </file>
 
-<file path=ppt/slides/slide6.xml><?xml version="1.0" encoding="utf-8"?>
+<file path=ppt/slides/slide5.xml><?xml version="1.0" encoding="utf-8"?>
 <p:sld xmlns:a="http://schemas.openxmlformats.org/drawingml/2006/main" xmlns:p="http://schemas.openxmlformats.org/presentationml/2006/main" xmlns:r="http://schemas.openxmlformats.org/officeDocument/2006/relationships">
   <p:cSld>
     <p:spTree>
@@ -4920,7 +4920,7 @@
 </p:sld>
 </file>
 
-<file path=ppt/slides/slide7.xml><?xml version="1.0" encoding="utf-8"?>
+<file path=ppt/slides/slide6.xml><?xml version="1.0" encoding="utf-8"?>
 <p:sld xmlns:a="http://schemas.openxmlformats.org/drawingml/2006/main" xmlns:p="http://schemas.openxmlformats.org/presentationml/2006/main" xmlns:r="http://schemas.openxmlformats.org/officeDocument/2006/relationships">
   <p:cSld>
     <p:spTree>

--- a/docs/flowgrid-os-partner-deck.pptx
+++ b/docs/flowgrid-os-partner-deck.pptx
@@ -5073,7 +5073,7 @@
                 </a:solidFill>
                 <a:latin typeface="Calibri"/>
               </a:rPr>
-              <a:t>clive@platform91.com</a:t>
+              <a:t>hello@flowgridos.co.uk</a:t>
             </a:r>
           </a:p>
         </p:txBody>

--- a/docs/flowgrid-os-partner-deck.pptx
+++ b/docs/flowgrid-os-partner-deck.pptx
@@ -3701,7 +3701,7 @@
               </a:defRPr>
             </a:pPr>
             <a:r>
-              <a:t>• Vault &amp; confirmed facts: cited answers, with each client isolated at the database level.</a:t>
+              <a:t>• Documents &amp; confirmed facts: cited answers, with each client isolated at the database level.</a:t>
             </a:r>
           </a:p>
           <a:p>
@@ -3720,7 +3720,26 @@
               </a:defRPr>
             </a:pPr>
             <a:r>
-              <a:t>• Modules: projects, exports and sector modules (Groundwork and Grantwork, available in pilot).</a:t>
+              <a:t>• Projects: every project has chat, documents and a plan of owned tasks, plus branded exports.</a:t>
+            </a:r>
+          </a:p>
+          <a:p>
+            <a:pPr>
+              <a:lnSpc>
+                <a:spcPct val="120000"/>
+              </a:lnSpc>
+              <a:spcAft>
+                <a:spcPts val="1000"/>
+              </a:spcAft>
+              <a:defRPr sz="2200">
+                <a:solidFill>
+                  <a:srgbClr val="2D2A26"/>
+                </a:solidFill>
+                <a:latin typeface="Calibri"/>
+              </a:defRPr>
+            </a:pPr>
+            <a:r>
+              <a:t>• Sector modules, switched on per client: Groundwork · Development projects and Grantwork · Grant funding (available in pilot), and Contacts as a tab on any project.</a:t>
             </a:r>
           </a:p>
         </p:txBody>
@@ -3931,7 +3950,7 @@
               </a:defRPr>
             </a:pPr>
             <a:r>
-              <a:t>• Sticky clients: vault, projects and usage data increase switching costs.</a:t>
+              <a:t>• Sticky clients: documents, projects and usage data increase switching costs.</a:t>
             </a:r>
           </a:p>
           <a:p>

--- a/docs/flowgrid-os-partner-deck.pptx
+++ b/docs/flowgrid-os-partner-deck.pptx
@@ -3720,7 +3720,7 @@
               </a:defRPr>
             </a:pPr>
             <a:r>
-              <a:t>• Projects: every project has chat, documents and a plan of owned tasks, plus branded exports.</a:t>
+              <a:t>• Projects: every project has chat, documents and an optional plan of owned tasks, plus branded exports.</a:t>
             </a:r>
           </a:p>
           <a:p>

--- a/docs/flowgrid-os-partner-deck.pptx
+++ b/docs/flowgrid-os-partner-deck.pptx
@@ -3701,7 +3701,7 @@
               </a:defRPr>
             </a:pPr>
             <a:r>
-              <a:t>• Vault &amp; confirmed facts: cited answers, with each client isolated at the database level.</a:t>
+              <a:t>• Documents &amp; confirmed facts: cited answers, with each client isolated at the database level.</a:t>
             </a:r>
           </a:p>
           <a:p>
@@ -3720,7 +3720,26 @@
               </a:defRPr>
             </a:pPr>
             <a:r>
-              <a:t>• Modules: projects, exports and sector modules (Groundwork and Grantwork, available in pilot).</a:t>
+              <a:t>• Projects: every project has chat, documents and an optional plan of owned tasks, plus branded exports.</a:t>
+            </a:r>
+          </a:p>
+          <a:p>
+            <a:pPr>
+              <a:lnSpc>
+                <a:spcPct val="120000"/>
+              </a:lnSpc>
+              <a:spcAft>
+                <a:spcPts val="1000"/>
+              </a:spcAft>
+              <a:defRPr sz="2200">
+                <a:solidFill>
+                  <a:srgbClr val="2D2A26"/>
+                </a:solidFill>
+                <a:latin typeface="Calibri"/>
+              </a:defRPr>
+            </a:pPr>
+            <a:r>
+              <a:t>• Sector modules, switched on per client: Groundwork · Development projects and Grantwork · Grant funding (available in pilot), and Contacts as a tab on any project.</a:t>
             </a:r>
           </a:p>
         </p:txBody>
@@ -3931,7 +3950,7 @@
               </a:defRPr>
             </a:pPr>
             <a:r>
-              <a:t>• Sticky clients: vault, projects and usage data increase switching costs.</a:t>
+              <a:t>• Sticky clients: documents, projects and usage data increase switching costs.</a:t>
             </a:r>
           </a:p>
           <a:p>
